--- a/content/week3_2024Final.pptx
+++ b/content/week3_2024Final.pptx
@@ -186,9 +186,501 @@
 <file path=ppt/revisionInfo.xml><?xml version="1.0" encoding="utf-8"?>
 <p1510:revInfo xmlns:a="http://schemas.openxmlformats.org/drawingml/2006/main" xmlns:r="http://schemas.openxmlformats.org/officeDocument/2006/relationships" xmlns:p1510="http://schemas.microsoft.com/office/powerpoint/2015/10/main">
   <p1510:revLst>
-    <p1510:client id="{00C957B8-3DA6-4E69-A259-6A4D27AF5797}" v="5" dt="2024-10-02T11:22:17.559"/>
+    <p1510:client id="{00C957B8-3DA6-4E69-A259-6A4D27AF5797}" v="6" dt="2024-10-07T14:40:43.144"/>
   </p1510:revLst>
 </p1510:revInfo>
+</file>
+
+<file path=ppt/changesInfos/changesInfo1.xml><?xml version="1.0" encoding="utf-8"?>
+<pc:chgInfo xmlns:a="http://schemas.openxmlformats.org/drawingml/2006/main" xmlns:r="http://schemas.openxmlformats.org/officeDocument/2006/relationships" xmlns:ac="http://schemas.microsoft.com/office/drawing/2013/main/command" xmlns:pc="http://schemas.microsoft.com/office/powerpoint/2013/main/command">
+  <pc:docChgLst>
+    <pc:chgData name="Marisa Llorens Salvador" userId="c80fc008-d1da-4311-939b-b78dfe62e0c7" providerId="ADAL" clId="{00C957B8-3DA6-4E69-A259-6A4D27AF5797}"/>
+    <pc:docChg chg="undo custSel addSld delSld modSld">
+      <pc:chgData name="Marisa Llorens Salvador" userId="c80fc008-d1da-4311-939b-b78dfe62e0c7" providerId="ADAL" clId="{00C957B8-3DA6-4E69-A259-6A4D27AF5797}" dt="2024-10-07T14:41:21.404" v="154" actId="14100"/>
+      <pc:docMkLst>
+        <pc:docMk/>
+      </pc:docMkLst>
+      <pc:sldChg chg="modSp mod">
+        <pc:chgData name="Marisa Llorens Salvador" userId="c80fc008-d1da-4311-939b-b78dfe62e0c7" providerId="ADAL" clId="{00C957B8-3DA6-4E69-A259-6A4D27AF5797}" dt="2024-09-30T14:30:24.603" v="96" actId="5793"/>
+        <pc:sldMkLst>
+          <pc:docMk/>
+          <pc:sldMk cId="3616250592" sldId="278"/>
+        </pc:sldMkLst>
+        <pc:spChg chg="mod">
+          <ac:chgData name="Marisa Llorens Salvador" userId="c80fc008-d1da-4311-939b-b78dfe62e0c7" providerId="ADAL" clId="{00C957B8-3DA6-4E69-A259-6A4D27AF5797}" dt="2024-09-30T14:30:24.603" v="96" actId="5793"/>
+          <ac:spMkLst>
+            <pc:docMk/>
+            <pc:sldMk cId="3616250592" sldId="278"/>
+            <ac:spMk id="3" creationId="{00000000-0000-0000-0000-000000000000}"/>
+          </ac:spMkLst>
+        </pc:spChg>
+        <pc:picChg chg="mod">
+          <ac:chgData name="Marisa Llorens Salvador" userId="c80fc008-d1da-4311-939b-b78dfe62e0c7" providerId="ADAL" clId="{00C957B8-3DA6-4E69-A259-6A4D27AF5797}" dt="2024-09-30T14:30:22.542" v="94" actId="1076"/>
+          <ac:picMkLst>
+            <pc:docMk/>
+            <pc:sldMk cId="3616250592" sldId="278"/>
+            <ac:picMk id="4" creationId="{00000000-0000-0000-0000-000000000000}"/>
+          </ac:picMkLst>
+        </pc:picChg>
+      </pc:sldChg>
+      <pc:sldChg chg="addSp delSp modSp mod">
+        <pc:chgData name="Marisa Llorens Salvador" userId="c80fc008-d1da-4311-939b-b78dfe62e0c7" providerId="ADAL" clId="{00C957B8-3DA6-4E69-A259-6A4D27AF5797}" dt="2024-09-25T20:04:28.592" v="58" actId="1076"/>
+        <pc:sldMkLst>
+          <pc:docMk/>
+          <pc:sldMk cId="3369035338" sldId="281"/>
+        </pc:sldMkLst>
+        <pc:picChg chg="del">
+          <ac:chgData name="Marisa Llorens Salvador" userId="c80fc008-d1da-4311-939b-b78dfe62e0c7" providerId="ADAL" clId="{00C957B8-3DA6-4E69-A259-6A4D27AF5797}" dt="2024-09-25T20:04:15.314" v="53" actId="478"/>
+          <ac:picMkLst>
+            <pc:docMk/>
+            <pc:sldMk cId="3369035338" sldId="281"/>
+            <ac:picMk id="4" creationId="{00000000-0000-0000-0000-000000000000}"/>
+          </ac:picMkLst>
+        </pc:picChg>
+        <pc:picChg chg="add mod">
+          <ac:chgData name="Marisa Llorens Salvador" userId="c80fc008-d1da-4311-939b-b78dfe62e0c7" providerId="ADAL" clId="{00C957B8-3DA6-4E69-A259-6A4D27AF5797}" dt="2024-09-25T20:04:28.592" v="58" actId="1076"/>
+          <ac:picMkLst>
+            <pc:docMk/>
+            <pc:sldMk cId="3369035338" sldId="281"/>
+            <ac:picMk id="8" creationId="{6DBCD072-F990-C10E-928E-826772A70BDF}"/>
+          </ac:picMkLst>
+        </pc:picChg>
+      </pc:sldChg>
+      <pc:sldChg chg="modSp mod">
+        <pc:chgData name="Marisa Llorens Salvador" userId="c80fc008-d1da-4311-939b-b78dfe62e0c7" providerId="ADAL" clId="{00C957B8-3DA6-4E69-A259-6A4D27AF5797}" dt="2024-09-25T20:05:17.976" v="63" actId="20577"/>
+        <pc:sldMkLst>
+          <pc:docMk/>
+          <pc:sldMk cId="1251325170" sldId="283"/>
+        </pc:sldMkLst>
+        <pc:spChg chg="mod">
+          <ac:chgData name="Marisa Llorens Salvador" userId="c80fc008-d1da-4311-939b-b78dfe62e0c7" providerId="ADAL" clId="{00C957B8-3DA6-4E69-A259-6A4D27AF5797}" dt="2024-09-25T20:05:17.976" v="63" actId="20577"/>
+          <ac:spMkLst>
+            <pc:docMk/>
+            <pc:sldMk cId="1251325170" sldId="283"/>
+            <ac:spMk id="3" creationId="{00000000-0000-0000-0000-000000000000}"/>
+          </ac:spMkLst>
+        </pc:spChg>
+      </pc:sldChg>
+      <pc:sldChg chg="modSp mod">
+        <pc:chgData name="Marisa Llorens Salvador" userId="c80fc008-d1da-4311-939b-b78dfe62e0c7" providerId="ADAL" clId="{00C957B8-3DA6-4E69-A259-6A4D27AF5797}" dt="2024-09-25T20:06:11.963" v="81" actId="1076"/>
+        <pc:sldMkLst>
+          <pc:docMk/>
+          <pc:sldMk cId="3258953138" sldId="284"/>
+        </pc:sldMkLst>
+        <pc:spChg chg="mod">
+          <ac:chgData name="Marisa Llorens Salvador" userId="c80fc008-d1da-4311-939b-b78dfe62e0c7" providerId="ADAL" clId="{00C957B8-3DA6-4E69-A259-6A4D27AF5797}" dt="2024-09-25T20:06:02.568" v="80" actId="20577"/>
+          <ac:spMkLst>
+            <pc:docMk/>
+            <pc:sldMk cId="3258953138" sldId="284"/>
+            <ac:spMk id="3" creationId="{00000000-0000-0000-0000-000000000000}"/>
+          </ac:spMkLst>
+        </pc:spChg>
+        <pc:picChg chg="mod">
+          <ac:chgData name="Marisa Llorens Salvador" userId="c80fc008-d1da-4311-939b-b78dfe62e0c7" providerId="ADAL" clId="{00C957B8-3DA6-4E69-A259-6A4D27AF5797}" dt="2024-09-25T20:06:11.963" v="81" actId="1076"/>
+          <ac:picMkLst>
+            <pc:docMk/>
+            <pc:sldMk cId="3258953138" sldId="284"/>
+            <ac:picMk id="4" creationId="{00000000-0000-0000-0000-000000000000}"/>
+          </ac:picMkLst>
+        </pc:picChg>
+      </pc:sldChg>
+      <pc:sldChg chg="modSp mod">
+        <pc:chgData name="Marisa Llorens Salvador" userId="c80fc008-d1da-4311-939b-b78dfe62e0c7" providerId="ADAL" clId="{00C957B8-3DA6-4E69-A259-6A4D27AF5797}" dt="2024-09-30T14:48:02.434" v="98" actId="20577"/>
+        <pc:sldMkLst>
+          <pc:docMk/>
+          <pc:sldMk cId="3065068057" sldId="288"/>
+        </pc:sldMkLst>
+        <pc:spChg chg="mod">
+          <ac:chgData name="Marisa Llorens Salvador" userId="c80fc008-d1da-4311-939b-b78dfe62e0c7" providerId="ADAL" clId="{00C957B8-3DA6-4E69-A259-6A4D27AF5797}" dt="2024-09-30T14:48:02.434" v="98" actId="20577"/>
+          <ac:spMkLst>
+            <pc:docMk/>
+            <pc:sldMk cId="3065068057" sldId="288"/>
+            <ac:spMk id="3" creationId="{00000000-0000-0000-0000-000000000000}"/>
+          </ac:spMkLst>
+        </pc:spChg>
+      </pc:sldChg>
+      <pc:sldChg chg="add del">
+        <pc:chgData name="Marisa Llorens Salvador" userId="c80fc008-d1da-4311-939b-b78dfe62e0c7" providerId="ADAL" clId="{00C957B8-3DA6-4E69-A259-6A4D27AF5797}" dt="2024-09-30T14:29:40.334" v="92" actId="47"/>
+        <pc:sldMkLst>
+          <pc:docMk/>
+          <pc:sldMk cId="1018129383" sldId="299"/>
+        </pc:sldMkLst>
+      </pc:sldChg>
+      <pc:sldChg chg="modSp mod">
+        <pc:chgData name="Marisa Llorens Salvador" userId="c80fc008-d1da-4311-939b-b78dfe62e0c7" providerId="ADAL" clId="{00C957B8-3DA6-4E69-A259-6A4D27AF5797}" dt="2024-10-02T17:07:17.551" v="144" actId="27636"/>
+        <pc:sldMkLst>
+          <pc:docMk/>
+          <pc:sldMk cId="2162650918" sldId="310"/>
+        </pc:sldMkLst>
+        <pc:spChg chg="mod">
+          <ac:chgData name="Marisa Llorens Salvador" userId="c80fc008-d1da-4311-939b-b78dfe62e0c7" providerId="ADAL" clId="{00C957B8-3DA6-4E69-A259-6A4D27AF5797}" dt="2024-10-02T17:07:17.551" v="144" actId="27636"/>
+          <ac:spMkLst>
+            <pc:docMk/>
+            <pc:sldMk cId="2162650918" sldId="310"/>
+            <ac:spMk id="3" creationId="{00000000-0000-0000-0000-000000000000}"/>
+          </ac:spMkLst>
+        </pc:spChg>
+      </pc:sldChg>
+      <pc:sldChg chg="modSp mod">
+        <pc:chgData name="Marisa Llorens Salvador" userId="c80fc008-d1da-4311-939b-b78dfe62e0c7" providerId="ADAL" clId="{00C957B8-3DA6-4E69-A259-6A4D27AF5797}" dt="2024-09-25T20:01:08.044" v="19" actId="27636"/>
+        <pc:sldMkLst>
+          <pc:docMk/>
+          <pc:sldMk cId="1745377833" sldId="312"/>
+        </pc:sldMkLst>
+        <pc:spChg chg="mod">
+          <ac:chgData name="Marisa Llorens Salvador" userId="c80fc008-d1da-4311-939b-b78dfe62e0c7" providerId="ADAL" clId="{00C957B8-3DA6-4E69-A259-6A4D27AF5797}" dt="2024-09-25T20:01:08.044" v="19" actId="27636"/>
+          <ac:spMkLst>
+            <pc:docMk/>
+            <pc:sldMk cId="1745377833" sldId="312"/>
+            <ac:spMk id="3" creationId="{00000000-0000-0000-0000-000000000000}"/>
+          </ac:spMkLst>
+        </pc:spChg>
+      </pc:sldChg>
+      <pc:sldChg chg="modSp mod">
+        <pc:chgData name="Marisa Llorens Salvador" userId="c80fc008-d1da-4311-939b-b78dfe62e0c7" providerId="ADAL" clId="{00C957B8-3DA6-4E69-A259-6A4D27AF5797}" dt="2024-09-25T20:01:08.030" v="18" actId="27636"/>
+        <pc:sldMkLst>
+          <pc:docMk/>
+          <pc:sldMk cId="1880393749" sldId="334"/>
+        </pc:sldMkLst>
+        <pc:spChg chg="mod">
+          <ac:chgData name="Marisa Llorens Salvador" userId="c80fc008-d1da-4311-939b-b78dfe62e0c7" providerId="ADAL" clId="{00C957B8-3DA6-4E69-A259-6A4D27AF5797}" dt="2024-09-25T20:01:08.030" v="18" actId="27636"/>
+          <ac:spMkLst>
+            <pc:docMk/>
+            <pc:sldMk cId="1880393749" sldId="334"/>
+            <ac:spMk id="3" creationId="{00000000-0000-0000-0000-000000000000}"/>
+          </ac:spMkLst>
+        </pc:spChg>
+      </pc:sldChg>
+      <pc:sldChg chg="addSp delSp modSp mod">
+        <pc:chgData name="Marisa Llorens Salvador" userId="c80fc008-d1da-4311-939b-b78dfe62e0c7" providerId="ADAL" clId="{00C957B8-3DA6-4E69-A259-6A4D27AF5797}" dt="2024-09-25T20:04:11.122" v="52" actId="1076"/>
+        <pc:sldMkLst>
+          <pc:docMk/>
+          <pc:sldMk cId="964898997" sldId="335"/>
+        </pc:sldMkLst>
+        <pc:picChg chg="add mod">
+          <ac:chgData name="Marisa Llorens Salvador" userId="c80fc008-d1da-4311-939b-b78dfe62e0c7" providerId="ADAL" clId="{00C957B8-3DA6-4E69-A259-6A4D27AF5797}" dt="2024-09-25T20:04:11.122" v="52" actId="1076"/>
+          <ac:picMkLst>
+            <pc:docMk/>
+            <pc:sldMk cId="964898997" sldId="335"/>
+            <ac:picMk id="4" creationId="{6F9489A3-D0D7-FD02-42D6-0FD4DD6C113A}"/>
+          </ac:picMkLst>
+        </pc:picChg>
+        <pc:picChg chg="del">
+          <ac:chgData name="Marisa Llorens Salvador" userId="c80fc008-d1da-4311-939b-b78dfe62e0c7" providerId="ADAL" clId="{00C957B8-3DA6-4E69-A259-6A4D27AF5797}" dt="2024-09-25T20:04:03.519" v="49" actId="478"/>
+          <ac:picMkLst>
+            <pc:docMk/>
+            <pc:sldMk cId="964898997" sldId="335"/>
+            <ac:picMk id="6" creationId="{00000000-0000-0000-0000-000000000000}"/>
+          </ac:picMkLst>
+        </pc:picChg>
+      </pc:sldChg>
+      <pc:sldChg chg="modSp mod">
+        <pc:chgData name="Marisa Llorens Salvador" userId="c80fc008-d1da-4311-939b-b78dfe62e0c7" providerId="ADAL" clId="{00C957B8-3DA6-4E69-A259-6A4D27AF5797}" dt="2024-09-25T20:01:07.945" v="12" actId="27636"/>
+        <pc:sldMkLst>
+          <pc:docMk/>
+          <pc:sldMk cId="2237111549" sldId="343"/>
+        </pc:sldMkLst>
+        <pc:spChg chg="mod">
+          <ac:chgData name="Marisa Llorens Salvador" userId="c80fc008-d1da-4311-939b-b78dfe62e0c7" providerId="ADAL" clId="{00C957B8-3DA6-4E69-A259-6A4D27AF5797}" dt="2024-09-25T20:01:07.945" v="12" actId="27636"/>
+          <ac:spMkLst>
+            <pc:docMk/>
+            <pc:sldMk cId="2237111549" sldId="343"/>
+            <ac:spMk id="3" creationId="{00000000-0000-0000-0000-000000000000}"/>
+          </ac:spMkLst>
+        </pc:spChg>
+      </pc:sldChg>
+      <pc:sldChg chg="addSp delSp modSp mod">
+        <pc:chgData name="Marisa Llorens Salvador" userId="c80fc008-d1da-4311-939b-b78dfe62e0c7" providerId="ADAL" clId="{00C957B8-3DA6-4E69-A259-6A4D27AF5797}" dt="2024-10-07T14:41:21.404" v="154" actId="14100"/>
+        <pc:sldMkLst>
+          <pc:docMk/>
+          <pc:sldMk cId="3593961141" sldId="348"/>
+        </pc:sldMkLst>
+        <pc:spChg chg="add del mod">
+          <ac:chgData name="Marisa Llorens Salvador" userId="c80fc008-d1da-4311-939b-b78dfe62e0c7" providerId="ADAL" clId="{00C957B8-3DA6-4E69-A259-6A4D27AF5797}" dt="2024-10-07T14:40:43.144" v="146" actId="931"/>
+          <ac:spMkLst>
+            <pc:docMk/>
+            <pc:sldMk cId="3593961141" sldId="348"/>
+            <ac:spMk id="6" creationId="{73170D1B-881D-EC3F-C1B4-91812272F6C7}"/>
+          </ac:spMkLst>
+        </pc:spChg>
+        <pc:picChg chg="del">
+          <ac:chgData name="Marisa Llorens Salvador" userId="c80fc008-d1da-4311-939b-b78dfe62e0c7" providerId="ADAL" clId="{00C957B8-3DA6-4E69-A259-6A4D27AF5797}" dt="2024-10-07T14:40:25.646" v="145" actId="478"/>
+          <ac:picMkLst>
+            <pc:docMk/>
+            <pc:sldMk cId="3593961141" sldId="348"/>
+            <ac:picMk id="5" creationId="{00000000-0000-0000-0000-000000000000}"/>
+          </ac:picMkLst>
+        </pc:picChg>
+        <pc:picChg chg="add mod modCrop">
+          <ac:chgData name="Marisa Llorens Salvador" userId="c80fc008-d1da-4311-939b-b78dfe62e0c7" providerId="ADAL" clId="{00C957B8-3DA6-4E69-A259-6A4D27AF5797}" dt="2024-10-07T14:41:21.404" v="154" actId="14100"/>
+          <ac:picMkLst>
+            <pc:docMk/>
+            <pc:sldMk cId="3593961141" sldId="348"/>
+            <ac:picMk id="8" creationId="{22228892-0708-6043-1862-BD7E2E477D14}"/>
+          </ac:picMkLst>
+        </pc:picChg>
+      </pc:sldChg>
+      <pc:sldChg chg="modSp mod">
+        <pc:chgData name="Marisa Llorens Salvador" userId="c80fc008-d1da-4311-939b-b78dfe62e0c7" providerId="ADAL" clId="{00C957B8-3DA6-4E69-A259-6A4D27AF5797}" dt="2024-09-25T20:01:07.916" v="9" actId="27636"/>
+        <pc:sldMkLst>
+          <pc:docMk/>
+          <pc:sldMk cId="2239402360" sldId="350"/>
+        </pc:sldMkLst>
+        <pc:spChg chg="mod">
+          <ac:chgData name="Marisa Llorens Salvador" userId="c80fc008-d1da-4311-939b-b78dfe62e0c7" providerId="ADAL" clId="{00C957B8-3DA6-4E69-A259-6A4D27AF5797}" dt="2024-09-25T20:01:07.916" v="9" actId="27636"/>
+          <ac:spMkLst>
+            <pc:docMk/>
+            <pc:sldMk cId="2239402360" sldId="350"/>
+            <ac:spMk id="5" creationId="{00000000-0000-0000-0000-000000000000}"/>
+          </ac:spMkLst>
+        </pc:spChg>
+      </pc:sldChg>
+      <pc:sldChg chg="modSp mod">
+        <pc:chgData name="Marisa Llorens Salvador" userId="c80fc008-d1da-4311-939b-b78dfe62e0c7" providerId="ADAL" clId="{00C957B8-3DA6-4E69-A259-6A4D27AF5797}" dt="2024-09-25T20:02:31.774" v="48" actId="27636"/>
+        <pc:sldMkLst>
+          <pc:docMk/>
+          <pc:sldMk cId="3447338613" sldId="351"/>
+        </pc:sldMkLst>
+        <pc:spChg chg="mod">
+          <ac:chgData name="Marisa Llorens Salvador" userId="c80fc008-d1da-4311-939b-b78dfe62e0c7" providerId="ADAL" clId="{00C957B8-3DA6-4E69-A259-6A4D27AF5797}" dt="2024-09-25T20:02:31.774" v="48" actId="27636"/>
+          <ac:spMkLst>
+            <pc:docMk/>
+            <pc:sldMk cId="3447338613" sldId="351"/>
+            <ac:spMk id="9" creationId="{00000000-0000-0000-0000-000000000000}"/>
+          </ac:spMkLst>
+        </pc:spChg>
+      </pc:sldChg>
+      <pc:sldChg chg="modSp mod">
+        <pc:chgData name="Marisa Llorens Salvador" userId="c80fc008-d1da-4311-939b-b78dfe62e0c7" providerId="ADAL" clId="{00C957B8-3DA6-4E69-A259-6A4D27AF5797}" dt="2024-09-25T20:02:01.777" v="43" actId="1076"/>
+        <pc:sldMkLst>
+          <pc:docMk/>
+          <pc:sldMk cId="543725143" sldId="352"/>
+        </pc:sldMkLst>
+        <pc:spChg chg="mod">
+          <ac:chgData name="Marisa Llorens Salvador" userId="c80fc008-d1da-4311-939b-b78dfe62e0c7" providerId="ADAL" clId="{00C957B8-3DA6-4E69-A259-6A4D27AF5797}" dt="2024-09-25T20:01:07.927" v="10" actId="27636"/>
+          <ac:spMkLst>
+            <pc:docMk/>
+            <pc:sldMk cId="543725143" sldId="352"/>
+            <ac:spMk id="5" creationId="{00000000-0000-0000-0000-000000000000}"/>
+          </ac:spMkLst>
+        </pc:spChg>
+        <pc:picChg chg="mod">
+          <ac:chgData name="Marisa Llorens Salvador" userId="c80fc008-d1da-4311-939b-b78dfe62e0c7" providerId="ADAL" clId="{00C957B8-3DA6-4E69-A259-6A4D27AF5797}" dt="2024-09-25T20:02:01.777" v="43" actId="1076"/>
+          <ac:picMkLst>
+            <pc:docMk/>
+            <pc:sldMk cId="543725143" sldId="352"/>
+            <ac:picMk id="8" creationId="{00000000-0000-0000-0000-000000000000}"/>
+          </ac:picMkLst>
+        </pc:picChg>
+      </pc:sldChg>
+      <pc:sldChg chg="modSp mod">
+        <pc:chgData name="Marisa Llorens Salvador" userId="c80fc008-d1da-4311-939b-b78dfe62e0c7" providerId="ADAL" clId="{00C957B8-3DA6-4E69-A259-6A4D27AF5797}" dt="2024-09-25T19:46:00.888" v="3" actId="27636"/>
+        <pc:sldMkLst>
+          <pc:docMk/>
+          <pc:sldMk cId="3440363527" sldId="353"/>
+        </pc:sldMkLst>
+        <pc:spChg chg="mod">
+          <ac:chgData name="Marisa Llorens Salvador" userId="c80fc008-d1da-4311-939b-b78dfe62e0c7" providerId="ADAL" clId="{00C957B8-3DA6-4E69-A259-6A4D27AF5797}" dt="2024-09-25T19:46:00.888" v="3" actId="27636"/>
+          <ac:spMkLst>
+            <pc:docMk/>
+            <pc:sldMk cId="3440363527" sldId="353"/>
+            <ac:spMk id="3" creationId="{00000000-0000-0000-0000-000000000000}"/>
+          </ac:spMkLst>
+        </pc:spChg>
+      </pc:sldChg>
+      <pc:sldChg chg="modSp mod">
+        <pc:chgData name="Marisa Llorens Salvador" userId="c80fc008-d1da-4311-939b-b78dfe62e0c7" providerId="ADAL" clId="{00C957B8-3DA6-4E69-A259-6A4D27AF5797}" dt="2024-09-25T19:47:02.753" v="5" actId="27636"/>
+        <pc:sldMkLst>
+          <pc:docMk/>
+          <pc:sldMk cId="1741007474" sldId="354"/>
+        </pc:sldMkLst>
+        <pc:spChg chg="mod">
+          <ac:chgData name="Marisa Llorens Salvador" userId="c80fc008-d1da-4311-939b-b78dfe62e0c7" providerId="ADAL" clId="{00C957B8-3DA6-4E69-A259-6A4D27AF5797}" dt="2024-09-25T19:47:02.753" v="5" actId="27636"/>
+          <ac:spMkLst>
+            <pc:docMk/>
+            <pc:sldMk cId="1741007474" sldId="354"/>
+            <ac:spMk id="3" creationId="{00000000-0000-0000-0000-000000000000}"/>
+          </ac:spMkLst>
+        </pc:spChg>
+      </pc:sldChg>
+      <pc:sldChg chg="modSp mod">
+        <pc:chgData name="Marisa Llorens Salvador" userId="c80fc008-d1da-4311-939b-b78dfe62e0c7" providerId="ADAL" clId="{00C957B8-3DA6-4E69-A259-6A4D27AF5797}" dt="2024-09-25T20:01:08.013" v="17" actId="27636"/>
+        <pc:sldMkLst>
+          <pc:docMk/>
+          <pc:sldMk cId="2021697537" sldId="355"/>
+        </pc:sldMkLst>
+        <pc:spChg chg="mod">
+          <ac:chgData name="Marisa Llorens Salvador" userId="c80fc008-d1da-4311-939b-b78dfe62e0c7" providerId="ADAL" clId="{00C957B8-3DA6-4E69-A259-6A4D27AF5797}" dt="2024-09-25T20:01:08.013" v="17" actId="27636"/>
+          <ac:spMkLst>
+            <pc:docMk/>
+            <pc:sldMk cId="2021697537" sldId="355"/>
+            <ac:spMk id="3" creationId="{00000000-0000-0000-0000-000000000000}"/>
+          </ac:spMkLst>
+        </pc:spChg>
+      </pc:sldChg>
+      <pc:sldChg chg="del">
+        <pc:chgData name="Marisa Llorens Salvador" userId="c80fc008-d1da-4311-939b-b78dfe62e0c7" providerId="ADAL" clId="{00C957B8-3DA6-4E69-A259-6A4D27AF5797}" dt="2024-10-02T11:17:34.343" v="99" actId="47"/>
+        <pc:sldMkLst>
+          <pc:docMk/>
+          <pc:sldMk cId="2627537093" sldId="360"/>
+        </pc:sldMkLst>
+      </pc:sldChg>
+      <pc:sldChg chg="modSp mod">
+        <pc:chgData name="Marisa Llorens Salvador" userId="c80fc008-d1da-4311-939b-b78dfe62e0c7" providerId="ADAL" clId="{00C957B8-3DA6-4E69-A259-6A4D27AF5797}" dt="2024-10-02T11:19:11.198" v="126" actId="20577"/>
+        <pc:sldMkLst>
+          <pc:docMk/>
+          <pc:sldMk cId="3309474160" sldId="363"/>
+        </pc:sldMkLst>
+        <pc:spChg chg="mod">
+          <ac:chgData name="Marisa Llorens Salvador" userId="c80fc008-d1da-4311-939b-b78dfe62e0c7" providerId="ADAL" clId="{00C957B8-3DA6-4E69-A259-6A4D27AF5797}" dt="2024-10-02T11:19:11.198" v="126" actId="20577"/>
+          <ac:spMkLst>
+            <pc:docMk/>
+            <pc:sldMk cId="3309474160" sldId="363"/>
+            <ac:spMk id="2" creationId="{00000000-0000-0000-0000-000000000000}"/>
+          </ac:spMkLst>
+        </pc:spChg>
+      </pc:sldChg>
+      <pc:sldChg chg="modSp mod">
+        <pc:chgData name="Marisa Llorens Salvador" userId="c80fc008-d1da-4311-939b-b78dfe62e0c7" providerId="ADAL" clId="{00C957B8-3DA6-4E69-A259-6A4D27AF5797}" dt="2024-09-25T20:01:07.957" v="13" actId="27636"/>
+        <pc:sldMkLst>
+          <pc:docMk/>
+          <pc:sldMk cId="2650941241" sldId="374"/>
+        </pc:sldMkLst>
+        <pc:spChg chg="mod">
+          <ac:chgData name="Marisa Llorens Salvador" userId="c80fc008-d1da-4311-939b-b78dfe62e0c7" providerId="ADAL" clId="{00C957B8-3DA6-4E69-A259-6A4D27AF5797}" dt="2024-09-25T20:01:07.957" v="13" actId="27636"/>
+          <ac:spMkLst>
+            <pc:docMk/>
+            <pc:sldMk cId="2650941241" sldId="374"/>
+            <ac:spMk id="3" creationId="{00000000-0000-0000-0000-000000000000}"/>
+          </ac:spMkLst>
+        </pc:spChg>
+      </pc:sldChg>
+      <pc:sldChg chg="delSp modSp mod">
+        <pc:chgData name="Marisa Llorens Salvador" userId="c80fc008-d1da-4311-939b-b78dfe62e0c7" providerId="ADAL" clId="{00C957B8-3DA6-4E69-A259-6A4D27AF5797}" dt="2024-09-25T20:05:28.435" v="64" actId="478"/>
+        <pc:sldMkLst>
+          <pc:docMk/>
+          <pc:sldMk cId="3013886788" sldId="376"/>
+        </pc:sldMkLst>
+        <pc:spChg chg="mod">
+          <ac:chgData name="Marisa Llorens Salvador" userId="c80fc008-d1da-4311-939b-b78dfe62e0c7" providerId="ADAL" clId="{00C957B8-3DA6-4E69-A259-6A4D27AF5797}" dt="2024-09-25T20:01:07.983" v="15" actId="27636"/>
+          <ac:spMkLst>
+            <pc:docMk/>
+            <pc:sldMk cId="3013886788" sldId="376"/>
+            <ac:spMk id="3" creationId="{00000000-0000-0000-0000-000000000000}"/>
+          </ac:spMkLst>
+        </pc:spChg>
+        <pc:picChg chg="del">
+          <ac:chgData name="Marisa Llorens Salvador" userId="c80fc008-d1da-4311-939b-b78dfe62e0c7" providerId="ADAL" clId="{00C957B8-3DA6-4E69-A259-6A4D27AF5797}" dt="2024-09-25T20:05:28.435" v="64" actId="478"/>
+          <ac:picMkLst>
+            <pc:docMk/>
+            <pc:sldMk cId="3013886788" sldId="376"/>
+            <ac:picMk id="4" creationId="{00000000-0000-0000-0000-000000000000}"/>
+          </ac:picMkLst>
+        </pc:picChg>
+      </pc:sldChg>
+      <pc:sldChg chg="modSp mod">
+        <pc:chgData name="Marisa Llorens Salvador" userId="c80fc008-d1da-4311-939b-b78dfe62e0c7" providerId="ADAL" clId="{00C957B8-3DA6-4E69-A259-6A4D27AF5797}" dt="2024-09-30T14:15:34.936" v="90" actId="403"/>
+        <pc:sldMkLst>
+          <pc:docMk/>
+          <pc:sldMk cId="1098647772" sldId="379"/>
+        </pc:sldMkLst>
+        <pc:spChg chg="mod">
+          <ac:chgData name="Marisa Llorens Salvador" userId="c80fc008-d1da-4311-939b-b78dfe62e0c7" providerId="ADAL" clId="{00C957B8-3DA6-4E69-A259-6A4D27AF5797}" dt="2024-09-30T14:15:34.936" v="90" actId="403"/>
+          <ac:spMkLst>
+            <pc:docMk/>
+            <pc:sldMk cId="1098647772" sldId="379"/>
+            <ac:spMk id="6" creationId="{00000000-0000-0000-0000-000000000000}"/>
+          </ac:spMkLst>
+        </pc:spChg>
+      </pc:sldChg>
+      <pc:sldChg chg="addSp modSp mod">
+        <pc:chgData name="Marisa Llorens Salvador" userId="c80fc008-d1da-4311-939b-b78dfe62e0c7" providerId="ADAL" clId="{00C957B8-3DA6-4E69-A259-6A4D27AF5797}" dt="2024-09-25T20:01:32.576" v="42" actId="20577"/>
+        <pc:sldMkLst>
+          <pc:docMk/>
+          <pc:sldMk cId="3425053978" sldId="382"/>
+        </pc:sldMkLst>
+        <pc:spChg chg="add mod">
+          <ac:chgData name="Marisa Llorens Salvador" userId="c80fc008-d1da-4311-939b-b78dfe62e0c7" providerId="ADAL" clId="{00C957B8-3DA6-4E69-A259-6A4D27AF5797}" dt="2024-09-25T20:01:32.576" v="42" actId="20577"/>
+          <ac:spMkLst>
+            <pc:docMk/>
+            <pc:sldMk cId="3425053978" sldId="382"/>
+            <ac:spMk id="3" creationId="{2E06D061-94AF-C574-49BA-7DE2BFDC7F19}"/>
+          </ac:spMkLst>
+        </pc:spChg>
+        <pc:spChg chg="mod">
+          <ac:chgData name="Marisa Llorens Salvador" userId="c80fc008-d1da-4311-939b-b78dfe62e0c7" providerId="ADAL" clId="{00C957B8-3DA6-4E69-A259-6A4D27AF5797}" dt="2024-09-25T20:01:20.757" v="25" actId="27636"/>
+          <ac:spMkLst>
+            <pc:docMk/>
+            <pc:sldMk cId="3425053978" sldId="382"/>
+            <ac:spMk id="5" creationId="{00000000-0000-0000-0000-000000000000}"/>
+          </ac:spMkLst>
+        </pc:spChg>
+      </pc:sldChg>
+      <pc:sldChg chg="del">
+        <pc:chgData name="Marisa Llorens Salvador" userId="c80fc008-d1da-4311-939b-b78dfe62e0c7" providerId="ADAL" clId="{00C957B8-3DA6-4E69-A259-6A4D27AF5797}" dt="2024-09-25T19:59:26.353" v="6" actId="47"/>
+        <pc:sldMkLst>
+          <pc:docMk/>
+          <pc:sldMk cId="2570558499" sldId="388"/>
+        </pc:sldMkLst>
+      </pc:sldChg>
+      <pc:sldChg chg="addSp modSp add mod">
+        <pc:chgData name="Marisa Llorens Salvador" userId="c80fc008-d1da-4311-939b-b78dfe62e0c7" providerId="ADAL" clId="{00C957B8-3DA6-4E69-A259-6A4D27AF5797}" dt="2024-10-02T11:22:39.390" v="142" actId="14100"/>
+        <pc:sldMkLst>
+          <pc:docMk/>
+          <pc:sldMk cId="3933378130" sldId="388"/>
+        </pc:sldMkLst>
+        <pc:spChg chg="mod">
+          <ac:chgData name="Marisa Llorens Salvador" userId="c80fc008-d1da-4311-939b-b78dfe62e0c7" providerId="ADAL" clId="{00C957B8-3DA6-4E69-A259-6A4D27AF5797}" dt="2024-10-02T11:21:18.605" v="128" actId="20577"/>
+          <ac:spMkLst>
+            <pc:docMk/>
+            <pc:sldMk cId="3933378130" sldId="388"/>
+            <ac:spMk id="2" creationId="{00000000-0000-0000-0000-000000000000}"/>
+          </ac:spMkLst>
+        </pc:spChg>
+        <pc:spChg chg="add mod">
+          <ac:chgData name="Marisa Llorens Salvador" userId="c80fc008-d1da-4311-939b-b78dfe62e0c7" providerId="ADAL" clId="{00C957B8-3DA6-4E69-A259-6A4D27AF5797}" dt="2024-10-02T11:22:07.188" v="134" actId="1582"/>
+          <ac:spMkLst>
+            <pc:docMk/>
+            <pc:sldMk cId="3933378130" sldId="388"/>
+            <ac:spMk id="11" creationId="{FF98EB2D-3A9A-B777-766D-D5428D2E4395}"/>
+          </ac:spMkLst>
+        </pc:spChg>
+        <pc:spChg chg="add mod">
+          <ac:chgData name="Marisa Llorens Salvador" userId="c80fc008-d1da-4311-939b-b78dfe62e0c7" providerId="ADAL" clId="{00C957B8-3DA6-4E69-A259-6A4D27AF5797}" dt="2024-10-02T11:22:14.896" v="136" actId="1076"/>
+          <ac:spMkLst>
+            <pc:docMk/>
+            <pc:sldMk cId="3933378130" sldId="388"/>
+            <ac:spMk id="12" creationId="{37B0D34B-1551-1FFB-AF2B-346E3E7E3973}"/>
+          </ac:spMkLst>
+        </pc:spChg>
+        <pc:spChg chg="add mod">
+          <ac:chgData name="Marisa Llorens Salvador" userId="c80fc008-d1da-4311-939b-b78dfe62e0c7" providerId="ADAL" clId="{00C957B8-3DA6-4E69-A259-6A4D27AF5797}" dt="2024-10-02T11:22:39.390" v="142" actId="14100"/>
+          <ac:spMkLst>
+            <pc:docMk/>
+            <pc:sldMk cId="3933378130" sldId="388"/>
+            <ac:spMk id="13" creationId="{C651A519-1F12-C60D-8186-1E9C6C3F31D3}"/>
+          </ac:spMkLst>
+        </pc:spChg>
+        <pc:grpChg chg="mod">
+          <ac:chgData name="Marisa Llorens Salvador" userId="c80fc008-d1da-4311-939b-b78dfe62e0c7" providerId="ADAL" clId="{00C957B8-3DA6-4E69-A259-6A4D27AF5797}" dt="2024-10-02T11:21:30.708" v="129" actId="1076"/>
+          <ac:grpSpMkLst>
+            <pc:docMk/>
+            <pc:sldMk cId="3933378130" sldId="388"/>
+            <ac:grpSpMk id="5" creationId="{00000000-0000-0000-0000-000000000000}"/>
+          </ac:grpSpMkLst>
+        </pc:grpChg>
+        <pc:picChg chg="mod">
+          <ac:chgData name="Marisa Llorens Salvador" userId="c80fc008-d1da-4311-939b-b78dfe62e0c7" providerId="ADAL" clId="{00C957B8-3DA6-4E69-A259-6A4D27AF5797}" dt="2024-10-02T11:22:21.378" v="139" actId="1076"/>
+          <ac:picMkLst>
+            <pc:docMk/>
+            <pc:sldMk cId="3933378130" sldId="388"/>
+            <ac:picMk id="6" creationId="{00000000-0000-0000-0000-000000000000}"/>
+          </ac:picMkLst>
+        </pc:picChg>
+      </pc:sldChg>
+    </pc:docChg>
+  </pc:docChgLst>
+</pc:chgInfo>
 </file>
 
 <file path=ppt/notesMasters/notesMaster1.xml><?xml version="1.0" encoding="utf-8"?>
@@ -273,7 +765,7 @@
           <a:p>
             <a:fld id="{C8585DF0-59FF-4857-9F82-F93A5D9DD461}" type="datetimeFigureOut">
               <a:rPr lang="en-IE" smtClean="0"/>
-              <a:t>02/10/2024</a:t>
+              <a:t>26/10/2024</a:t>
             </a:fld>
             <a:endParaRPr lang="en-IE"/>
           </a:p>
@@ -690,7 +1182,7 @@
           <a:p>
             <a:fld id="{62406725-EAD8-425D-899C-9472BA626451}" type="datetime1">
               <a:rPr lang="en-IE" smtClean="0"/>
-              <a:t>02/10/2024</a:t>
+              <a:t>26/10/2024</a:t>
             </a:fld>
             <a:endParaRPr lang="en-IE"/>
           </a:p>
@@ -811,7 +1303,7 @@
           <a:p>
             <a:fld id="{42EB7C3B-AFE7-4770-87DF-2024B6A51E31}" type="datetime1">
               <a:rPr lang="en-IE" smtClean="0"/>
-              <a:t>02/10/2024</a:t>
+              <a:t>26/10/2024</a:t>
             </a:fld>
             <a:endParaRPr lang="en-IE"/>
           </a:p>
@@ -1177,7 +1669,7 @@
           <a:p>
             <a:fld id="{783BA90F-610F-4D52-B7C8-2C522E82C176}" type="datetime1">
               <a:rPr lang="en-IE" smtClean="0"/>
-              <a:t>02/10/2024</a:t>
+              <a:t>26/10/2024</a:t>
             </a:fld>
             <a:endParaRPr lang="en-IE"/>
           </a:p>
@@ -1522,7 +2014,7 @@
           <a:p>
             <a:fld id="{0FA10263-AF41-4764-B6C7-D6453FFCD6A2}" type="datetime1">
               <a:rPr lang="en-IE" smtClean="0"/>
-              <a:t>02/10/2024</a:t>
+              <a:t>26/10/2024</a:t>
             </a:fld>
             <a:endParaRPr lang="en-IE"/>
           </a:p>
@@ -1774,7 +2266,7 @@
           <a:p>
             <a:fld id="{A35C0CB7-05F7-4FD8-AA5E-87064F36C456}" type="datetime1">
               <a:rPr lang="en-IE" smtClean="0"/>
-              <a:t>02/10/2024</a:t>
+              <a:t>26/10/2024</a:t>
             </a:fld>
             <a:endParaRPr lang="en-IE"/>
           </a:p>
@@ -2036,7 +2528,7 @@
           <a:p>
             <a:fld id="{5A4D724D-151F-4C98-8BE7-EFF43E847170}" type="datetime1">
               <a:rPr lang="en-IE" smtClean="0"/>
-              <a:t>02/10/2024</a:t>
+              <a:t>26/10/2024</a:t>
             </a:fld>
             <a:endParaRPr lang="en-IE"/>
           </a:p>
@@ -2296,7 +2788,7 @@
           <a:p>
             <a:fld id="{A1A1FC39-9C75-44F9-AA12-D44FD36F095D}" type="datetime1">
               <a:rPr lang="en-IE" smtClean="0"/>
-              <a:t>02/10/2024</a:t>
+              <a:t>26/10/2024</a:t>
             </a:fld>
             <a:endParaRPr lang="en-IE"/>
           </a:p>
@@ -2480,7 +2972,7 @@
           <a:p>
             <a:fld id="{42EB7C3B-AFE7-4770-87DF-2024B6A51E31}" type="datetime1">
               <a:rPr lang="en-IE" smtClean="0"/>
-              <a:t>02/10/2024</a:t>
+              <a:t>26/10/2024</a:t>
             </a:fld>
             <a:endParaRPr lang="en-IE"/>
           </a:p>
@@ -2932,7 +3424,7 @@
           <a:p>
             <a:fld id="{ADDC8B60-65EC-427B-83AC-13F1EA936364}" type="datetime1">
               <a:rPr lang="en-IE" smtClean="0"/>
-              <a:t>02/10/2024</a:t>
+              <a:t>26/10/2024</a:t>
             </a:fld>
             <a:endParaRPr lang="en-IE"/>
           </a:p>
@@ -3109,7 +3601,7 @@
           <a:p>
             <a:fld id="{42EB7C3B-AFE7-4770-87DF-2024B6A51E31}" type="datetime1">
               <a:rPr lang="en-IE" smtClean="0"/>
-              <a:t>02/10/2024</a:t>
+              <a:t>26/10/2024</a:t>
             </a:fld>
             <a:endParaRPr lang="en-IE"/>
           </a:p>
@@ -3493,7 +3985,7 @@
           <a:p>
             <a:fld id="{CBFB5C83-4A74-47A1-B8E2-8355713FDF40}" type="datetime1">
               <a:rPr lang="en-IE" smtClean="0"/>
-              <a:t>02/10/2024</a:t>
+              <a:t>26/10/2024</a:t>
             </a:fld>
             <a:endParaRPr lang="en-IE"/>
           </a:p>
@@ -3960,7 +4452,7 @@
           <a:p>
             <a:fld id="{8C3C7017-DDDC-46A3-A3D9-1B3378E953EB}" type="datetime1">
               <a:rPr lang="en-IE" smtClean="0"/>
-              <a:t>02/10/2024</a:t>
+              <a:t>26/10/2024</a:t>
             </a:fld>
             <a:endParaRPr lang="en-IE"/>
           </a:p>
@@ -4154,7 +4646,7 @@
           <a:p>
             <a:fld id="{418CD4B5-07EA-43A5-B6C2-8F479BA5E9E3}" type="datetime1">
               <a:rPr lang="en-IE" smtClean="0"/>
-              <a:t>02/10/2024</a:t>
+              <a:t>26/10/2024</a:t>
             </a:fld>
             <a:endParaRPr lang="en-IE"/>
           </a:p>
@@ -4267,7 +4759,7 @@
           <a:p>
             <a:fld id="{47C6AA7D-CB80-46AE-81A4-C2E3176CF9B5}" type="datetime1">
               <a:rPr lang="en-IE" smtClean="0"/>
-              <a:t>02/10/2024</a:t>
+              <a:t>26/10/2024</a:t>
             </a:fld>
             <a:endParaRPr lang="en-IE"/>
           </a:p>
@@ -4511,7 +5003,7 @@
           <a:p>
             <a:fld id="{42EB7C3B-AFE7-4770-87DF-2024B6A51E31}" type="datetime1">
               <a:rPr lang="en-IE" smtClean="0"/>
-              <a:t>02/10/2024</a:t>
+              <a:t>26/10/2024</a:t>
             </a:fld>
             <a:endParaRPr lang="en-IE"/>
           </a:p>
@@ -13932,7 +14424,7 @@
         </p:blipFill>
         <p:spPr>
           <a:xfrm>
-            <a:off x="1130025" y="1690684"/>
+            <a:off x="1138414" y="1690688"/>
             <a:ext cx="10081406" cy="4693313"/>
           </a:xfrm>
           <a:prstGeom prst="rect">
@@ -16619,35 +17111,6 @@
           </a:p>
         </p:txBody>
       </p:sp>
-      <p:pic>
-        <p:nvPicPr>
-          <p:cNvPr id="5" name="Content Placeholder 4"/>
-          <p:cNvPicPr>
-            <a:picLocks noGrp="1" noChangeAspect="1"/>
-          </p:cNvPicPr>
-          <p:nvPr>
-            <p:ph idx="1"/>
-          </p:nvPr>
-        </p:nvPicPr>
-        <p:blipFill>
-          <a:blip r:embed="rId2">
-            <a:extLst>
-              <a:ext uri="{28A0092B-C50C-407E-A947-70E740481C1C}">
-                <a14:useLocalDpi xmlns:a14="http://schemas.microsoft.com/office/drawing/2010/main" val="0"/>
-              </a:ext>
-            </a:extLst>
-          </a:blip>
-          <a:stretch>
-            <a:fillRect/>
-          </a:stretch>
-        </p:blipFill>
-        <p:spPr>
-          <a:xfrm>
-            <a:off x="1297641" y="1967706"/>
-            <a:ext cx="8941734" cy="4388644"/>
-          </a:xfrm>
-        </p:spPr>
-      </p:pic>
       <p:sp>
         <p:nvSpPr>
           <p:cNvPr id="4" name="Slide Number Placeholder 3"/>
@@ -16671,6 +17134,40 @@
           </a:p>
         </p:txBody>
       </p:sp>
+      <p:pic>
+        <p:nvPicPr>
+          <p:cNvPr id="8" name="Content Placeholder 7">
+            <a:extLst>
+              <a:ext uri="{FF2B5EF4-FFF2-40B4-BE49-F238E27FC236}">
+                <a16:creationId xmlns:a16="http://schemas.microsoft.com/office/drawing/2014/main" id="{22228892-0708-6043-1862-BD7E2E477D14}"/>
+              </a:ext>
+            </a:extLst>
+          </p:cNvPr>
+          <p:cNvPicPr>
+            <a:picLocks noGrp="1" noChangeAspect="1"/>
+          </p:cNvPicPr>
+          <p:nvPr>
+            <p:ph idx="1"/>
+          </p:nvPr>
+        </p:nvPicPr>
+        <p:blipFill rotWithShape="1">
+          <a:blip r:embed="rId2">
+            <a:extLst>
+              <a:ext uri="{96DAC541-7B7A-43D3-8B79-37D633B846F1}">
+                <asvg:svgBlip xmlns:asvg="http://schemas.microsoft.com/office/drawing/2016/SVG/main" r:embed="rId3"/>
+              </a:ext>
+            </a:extLst>
+          </a:blip>
+          <a:srcRect l="3569" t="6908" r="58380" b="61226"/>
+          <a:stretch/>
+        </p:blipFill>
+        <p:spPr>
+          <a:xfrm>
+            <a:off x="2400299" y="1840229"/>
+            <a:ext cx="7754535" cy="4548020"/>
+          </a:xfrm>
+        </p:spPr>
+      </p:pic>
     </p:spTree>
     <p:extLst>
       <p:ext uri="{BB962C8B-B14F-4D97-AF65-F5344CB8AC3E}">
@@ -19381,12 +19878,8 @@
               <a:t>Edmund Nevin </a:t>
             </a:r>
             <a:r>
-              <a:rPr lang="en-IE"/>
-              <a:t>for </a:t>
-            </a:r>
-            <a:r>
               <a:rPr lang="en-IE" dirty="0"/>
-              <a:t>earlier versions of these lecture notes</a:t>
+              <a:t>for earlier versions of these lecture notes</a:t>
             </a:r>
           </a:p>
         </p:txBody>
@@ -21358,6 +21851,14 @@
 </file>
 
 <file path=customXml/item1.xml><?xml version="1.0" encoding="utf-8"?>
+<p:properties xmlns:p="http://schemas.microsoft.com/office/2006/metadata/properties" xmlns:xsi="http://www.w3.org/2001/XMLSchema-instance" xmlns:pc="http://schemas.microsoft.com/office/infopath/2007/PartnerControls">
+  <documentManagement>
+    <_activity xmlns="186a8af6-524e-48fb-a2b5-8db5625d742b" xsi:nil="true"/>
+  </documentManagement>
+</p:properties>
+</file>
+
+<file path=customXml/item2.xml><?xml version="1.0" encoding="utf-8"?>
 <ct:contentTypeSchema xmlns:ct="http://schemas.microsoft.com/office/2006/metadata/contentType" xmlns:ma="http://schemas.microsoft.com/office/2006/metadata/properties/metaAttributes" ct:_="" ma:_="" ma:contentTypeName="Document" ma:contentTypeID="0x010100CE497A5DDE61EC49B38F08F69D7D1C30" ma:contentTypeVersion="15" ma:contentTypeDescription="Create a new document." ma:contentTypeScope="" ma:versionID="9bb0376d8ed59645cd949b27d95b7409">
   <xsd:schema xmlns:xsd="http://www.w3.org/2001/XMLSchema" xmlns:xs="http://www.w3.org/2001/XMLSchema" xmlns:p="http://schemas.microsoft.com/office/2006/metadata/properties" xmlns:ns3="186a8af6-524e-48fb-a2b5-8db5625d742b" xmlns:ns4="8713c86b-11c3-4892-8b22-8e1103c1c89f" targetNamespace="http://schemas.microsoft.com/office/2006/metadata/properties" ma:root="true" ma:fieldsID="dc57b1baf380e13117ae7081a2a87d27" ns3:_="" ns4:_="">
     <xsd:import namespace="186a8af6-524e-48fb-a2b5-8db5625d742b"/>
@@ -21592,7 +22093,7 @@
 </ct:contentTypeSchema>
 </file>
 
-<file path=customXml/item2.xml><?xml version="1.0" encoding="utf-8"?>
+<file path=customXml/item3.xml><?xml version="1.0" encoding="utf-8"?>
 <?mso-contentType ?>
 <FormTemplates xmlns="http://schemas.microsoft.com/sharepoint/v3/contenttype/forms">
   <Display>DocumentLibraryForm</Display>
@@ -21601,15 +22102,24 @@
 </FormTemplates>
 </file>
 
-<file path=customXml/item3.xml><?xml version="1.0" encoding="utf-8"?>
-<p:properties xmlns:p="http://schemas.microsoft.com/office/2006/metadata/properties" xmlns:xsi="http://www.w3.org/2001/XMLSchema-instance" xmlns:pc="http://schemas.microsoft.com/office/infopath/2007/PartnerControls">
-  <documentManagement>
-    <_activity xmlns="186a8af6-524e-48fb-a2b5-8db5625d742b" xsi:nil="true"/>
-  </documentManagement>
-</p:properties>
+<file path=customXml/itemProps1.xml><?xml version="1.0" encoding="utf-8"?>
+<ds:datastoreItem xmlns:ds="http://schemas.openxmlformats.org/officeDocument/2006/customXml" ds:itemID="{D221FDD8-B1EA-4914-AF01-B0D05527F1D1}">
+  <ds:schemaRefs>
+    <ds:schemaRef ds:uri="http://schemas.microsoft.com/office/2006/documentManagement/types"/>
+    <ds:schemaRef ds:uri="http://schemas.microsoft.com/office/2006/metadata/properties"/>
+    <ds:schemaRef ds:uri="http://purl.org/dc/dcmitype/"/>
+    <ds:schemaRef ds:uri="http://purl.org/dc/terms/"/>
+    <ds:schemaRef ds:uri="http://schemas.microsoft.com/office/infopath/2007/PartnerControls"/>
+    <ds:schemaRef ds:uri="http://purl.org/dc/elements/1.1/"/>
+    <ds:schemaRef ds:uri="http://schemas.openxmlformats.org/package/2006/metadata/core-properties"/>
+    <ds:schemaRef ds:uri="8713c86b-11c3-4892-8b22-8e1103c1c89f"/>
+    <ds:schemaRef ds:uri="186a8af6-524e-48fb-a2b5-8db5625d742b"/>
+    <ds:schemaRef ds:uri="http://www.w3.org/XML/1998/namespace"/>
+  </ds:schemaRefs>
+</ds:datastoreItem>
 </file>
 
-<file path=customXml/itemProps1.xml><?xml version="1.0" encoding="utf-8"?>
+<file path=customXml/itemProps2.xml><?xml version="1.0" encoding="utf-8"?>
 <ds:datastoreItem xmlns:ds="http://schemas.openxmlformats.org/officeDocument/2006/customXml" ds:itemID="{3333DAF0-97CC-4E47-82E5-70BA127510A9}">
   <ds:schemaRefs>
     <ds:schemaRef ds:uri="http://schemas.microsoft.com/office/2006/metadata/contentType"/>
@@ -21628,27 +22138,10 @@
 </ds:datastoreItem>
 </file>
 
-<file path=customXml/itemProps2.xml><?xml version="1.0" encoding="utf-8"?>
+<file path=customXml/itemProps3.xml><?xml version="1.0" encoding="utf-8"?>
 <ds:datastoreItem xmlns:ds="http://schemas.openxmlformats.org/officeDocument/2006/customXml" ds:itemID="{62D9A3DF-00B2-4113-87BB-9300D6C519CB}">
   <ds:schemaRefs>
     <ds:schemaRef ds:uri="http://schemas.microsoft.com/sharepoint/v3/contenttype/forms"/>
   </ds:schemaRefs>
 </ds:datastoreItem>
-</file>
-
-<file path=customXml/itemProps3.xml><?xml version="1.0" encoding="utf-8"?>
-<ds:datastoreItem xmlns:ds="http://schemas.openxmlformats.org/officeDocument/2006/customXml" ds:itemID="{D221FDD8-B1EA-4914-AF01-B0D05527F1D1}">
-  <ds:schemaRefs>
-    <ds:schemaRef ds:uri="http://schemas.microsoft.com/office/2006/documentManagement/types"/>
-    <ds:schemaRef ds:uri="http://schemas.microsoft.com/office/2006/metadata/properties"/>
-    <ds:schemaRef ds:uri="http://purl.org/dc/dcmitype/"/>
-    <ds:schemaRef ds:uri="http://purl.org/dc/terms/"/>
-    <ds:schemaRef ds:uri="http://schemas.microsoft.com/office/infopath/2007/PartnerControls"/>
-    <ds:schemaRef ds:uri="http://purl.org/dc/elements/1.1/"/>
-    <ds:schemaRef ds:uri="http://schemas.openxmlformats.org/package/2006/metadata/core-properties"/>
-    <ds:schemaRef ds:uri="8713c86b-11c3-4892-8b22-8e1103c1c89f"/>
-    <ds:schemaRef ds:uri="186a8af6-524e-48fb-a2b5-8db5625d742b"/>
-    <ds:schemaRef ds:uri="http://www.w3.org/XML/1998/namespace"/>
-  </ds:schemaRefs>
-</ds:datastoreItem>
 </file>